--- a/docs/presentaciones/classes/clase-123-pytorch-lightning-trainer-distribuido-presentacion.pptx
+++ b/docs/presentaciones/classes/clase-123-pytorch-lightning-trainer-distribuido-presentacion.pptx
@@ -3272,7 +3272,7 @@
                 </a:solidFill>
                 <a:latin typeface="Segoe UI"/>
               </a:rPr>
-              <a:t>Parte: 2 — Deep Learning · Fuente: Lightning docs.  Duración estimada: 80 min.</a:t>
+              <a:t>Parte: 2 — Deep Learning · Fuente: Lightning docs.  Duración estimada: 80 min. · Nivel: Avanzado</a:t>
             </a:r>
           </a:p>
         </p:txBody>
@@ -3581,7 +3581,7 @@
                 </a:solidFill>
                 <a:latin typeface="Segoe UI"/>
               </a:rPr>
-              <a:t>Parte: 2 — Deep Learning · Fuente: Lightning docs.  Duración estimada: 80 min.</a:t>
+              <a:t>Parte: 2 — Deep Learning · Fuente: Lightning docs.  Duración estimada: 80 min. · Nivel: Avanzado</a:t>
             </a:r>
           </a:p>
         </p:txBody>
